--- a/Oliver Ng - Presentation.pptx
+++ b/Oliver Ng - Presentation.pptx
@@ -123,6 +123,11 @@
       </a:defRPr>
     </a:lvl9pPr>
   </p:defaultTextStyle>
+  <p:extLst>
+    <p:ext uri="{EFAFB233-063F-42B5-8137-9DF3F51BA10A}">
+      <p15:sldGuideLst xmlns:p15="http://schemas.microsoft.com/office/powerpoint/2012/main"/>
+    </p:ext>
+  </p:extLst>
 </p:presentation>
 </file>
 
@@ -7609,42 +7614,6 @@
       </p:sp>
       <p:pic>
         <p:nvPicPr>
-          <p:cNvPr id="8" name="Picture 7">
-            <a:extLst>
-              <a:ext uri="{FF2B5EF4-FFF2-40B4-BE49-F238E27FC236}">
-                <a16:creationId xmlns:a16="http://schemas.microsoft.com/office/drawing/2014/main" id="{EA0493DD-7958-F09E-A4DB-B13E4EBE83C1}"/>
-              </a:ext>
-            </a:extLst>
-          </p:cNvPr>
-          <p:cNvPicPr>
-            <a:picLocks noChangeAspect="1"/>
-          </p:cNvPicPr>
-          <p:nvPr/>
-        </p:nvPicPr>
-        <p:blipFill>
-          <a:blip r:embed="rId3">
-            <a:extLst>
-              <a:ext uri="{28A0092B-C50C-407E-A947-70E740481C1C}">
-                <a14:useLocalDpi xmlns:a14="http://schemas.microsoft.com/office/drawing/2010/main" val="0"/>
-              </a:ext>
-            </a:extLst>
-          </a:blip>
-          <a:stretch>
-            <a:fillRect/>
-          </a:stretch>
-        </p:blipFill>
-        <p:spPr>
-          <a:xfrm>
-            <a:off x="5742433" y="424371"/>
-            <a:ext cx="6036024" cy="6036024"/>
-          </a:xfrm>
-          <a:prstGeom prst="rect">
-            <a:avLst/>
-          </a:prstGeom>
-        </p:spPr>
-      </p:pic>
-      <p:pic>
-        <p:nvPicPr>
           <p:cNvPr id="9" name="Graphic 8">
             <a:extLst>
               <a:ext uri="{FF2B5EF4-FFF2-40B4-BE49-F238E27FC236}">
@@ -7661,7 +7630,7 @@
           <a:blip>
             <a:extLst>
               <a:ext uri="{96DAC541-7B7A-43D3-8B79-37D633B846F1}">
-                <asvg:svgBlip xmlns:asvg="http://schemas.microsoft.com/office/drawing/2016/SVG/main" r:embed="rId4"/>
+                <asvg:svgBlip xmlns:asvg="http://schemas.microsoft.com/office/drawing/2016/SVG/main" r:embed="rId3"/>
               </a:ext>
             </a:extLst>
           </a:blip>
@@ -7673,6 +7642,42 @@
           <a:xfrm>
             <a:off x="606933" y="5762625"/>
             <a:ext cx="914400" cy="914400"/>
+          </a:xfrm>
+          <a:prstGeom prst="rect">
+            <a:avLst/>
+          </a:prstGeom>
+        </p:spPr>
+      </p:pic>
+      <p:pic>
+        <p:nvPicPr>
+          <p:cNvPr id="4" name="Picture 3">
+            <a:extLst>
+              <a:ext uri="{FF2B5EF4-FFF2-40B4-BE49-F238E27FC236}">
+                <a16:creationId xmlns:a16="http://schemas.microsoft.com/office/drawing/2014/main" id="{5591DE68-5B22-A3F8-2A45-5AEC4AA5B5A3}"/>
+              </a:ext>
+            </a:extLst>
+          </p:cNvPr>
+          <p:cNvPicPr>
+            <a:picLocks noChangeAspect="1"/>
+          </p:cNvPicPr>
+          <p:nvPr/>
+        </p:nvPicPr>
+        <p:blipFill>
+          <a:blip r:embed="rId4">
+            <a:extLst>
+              <a:ext uri="{28A0092B-C50C-407E-A947-70E740481C1C}">
+                <a14:useLocalDpi xmlns:a14="http://schemas.microsoft.com/office/drawing/2010/main" val="0"/>
+              </a:ext>
+            </a:extLst>
+          </a:blip>
+          <a:stretch>
+            <a:fillRect/>
+          </a:stretch>
+        </p:blipFill>
+        <p:spPr>
+          <a:xfrm>
+            <a:off x="5742433" y="424371"/>
+            <a:ext cx="6036024" cy="6036024"/>
           </a:xfrm>
           <a:prstGeom prst="rect">
             <a:avLst/>
@@ -7737,8 +7742,8 @@
           </a:p>
         </p:txBody>
       </p:sp>
-      <mc:AlternateContent xmlns:mc="http://schemas.openxmlformats.org/markup-compatibility/2006">
-        <mc:Choice xmlns:a14="http://schemas.microsoft.com/office/drawing/2010/main" Requires="a14">
+      <mc:AlternateContent xmlns:mc="http://schemas.openxmlformats.org/markup-compatibility/2006" xmlns:a14="http://schemas.microsoft.com/office/drawing/2010/main">
+        <mc:Choice Requires="a14">
           <p:sp>
             <p:nvSpPr>
               <p:cNvPr id="3" name="Content Placeholder 2">
@@ -8845,7 +8850,7 @@
             </p:txBody>
           </p:sp>
         </mc:Choice>
-        <mc:Fallback>
+        <mc:Fallback xmlns="">
           <p:sp>
             <p:nvSpPr>
               <p:cNvPr id="3" name="Content Placeholder 2">
@@ -9149,8 +9154,8 @@
           </p:spPr>
         </p:pic>
       </p:grpSp>
-      <mc:AlternateContent xmlns:mc="http://schemas.openxmlformats.org/markup-compatibility/2006">
-        <mc:Choice xmlns:p14="http://schemas.microsoft.com/office/powerpoint/2010/main" Requires="p14">
+      <mc:AlternateContent xmlns:mc="http://schemas.openxmlformats.org/markup-compatibility/2006" xmlns:p14="http://schemas.microsoft.com/office/powerpoint/2010/main">
+        <mc:Choice Requires="p14">
           <p:contentPart p14:bwMode="auto" r:id="rId4">
             <p14:nvContentPartPr>
               <p14:cNvPr id="10" name="Ink 9">
@@ -9169,7 +9174,7 @@
             </p14:xfrm>
           </p:contentPart>
         </mc:Choice>
-        <mc:Fallback>
+        <mc:Fallback xmlns="">
           <p:pic>
             <p:nvPicPr>
               <p:cNvPr id="10" name="Ink 9">
@@ -9200,8 +9205,8 @@
           </p:pic>
         </mc:Fallback>
       </mc:AlternateContent>
-      <mc:AlternateContent xmlns:mc="http://schemas.openxmlformats.org/markup-compatibility/2006">
-        <mc:Choice xmlns:p14="http://schemas.microsoft.com/office/powerpoint/2010/main" Requires="p14">
+      <mc:AlternateContent xmlns:mc="http://schemas.openxmlformats.org/markup-compatibility/2006" xmlns:p14="http://schemas.microsoft.com/office/powerpoint/2010/main">
+        <mc:Choice Requires="p14">
           <p:contentPart p14:bwMode="auto" r:id="rId6">
             <p14:nvContentPartPr>
               <p14:cNvPr id="11" name="Ink 10">
@@ -9220,7 +9225,7 @@
             </p14:xfrm>
           </p:contentPart>
         </mc:Choice>
-        <mc:Fallback>
+        <mc:Fallback xmlns="">
           <p:pic>
             <p:nvPicPr>
               <p:cNvPr id="11" name="Ink 10">
@@ -9251,8 +9256,8 @@
           </p:pic>
         </mc:Fallback>
       </mc:AlternateContent>
-      <mc:AlternateContent xmlns:mc="http://schemas.openxmlformats.org/markup-compatibility/2006">
-        <mc:Choice xmlns:p14="http://schemas.microsoft.com/office/powerpoint/2010/main" Requires="p14">
+      <mc:AlternateContent xmlns:mc="http://schemas.openxmlformats.org/markup-compatibility/2006" xmlns:p14="http://schemas.microsoft.com/office/powerpoint/2010/main">
+        <mc:Choice Requires="p14">
           <p:contentPart p14:bwMode="auto" r:id="rId8">
             <p14:nvContentPartPr>
               <p14:cNvPr id="12" name="Ink 11">
@@ -9271,7 +9276,7 @@
             </p14:xfrm>
           </p:contentPart>
         </mc:Choice>
-        <mc:Fallback>
+        <mc:Fallback xmlns="">
           <p:pic>
             <p:nvPicPr>
               <p:cNvPr id="12" name="Ink 11">
@@ -9302,8 +9307,8 @@
           </p:pic>
         </mc:Fallback>
       </mc:AlternateContent>
-      <mc:AlternateContent xmlns:mc="http://schemas.openxmlformats.org/markup-compatibility/2006">
-        <mc:Choice xmlns:p14="http://schemas.microsoft.com/office/powerpoint/2010/main" Requires="p14">
+      <mc:AlternateContent xmlns:mc="http://schemas.openxmlformats.org/markup-compatibility/2006" xmlns:p14="http://schemas.microsoft.com/office/powerpoint/2010/main">
+        <mc:Choice Requires="p14">
           <p:contentPart p14:bwMode="auto" r:id="rId10">
             <p14:nvContentPartPr>
               <p14:cNvPr id="13" name="Ink 12">
@@ -9322,7 +9327,7 @@
             </p14:xfrm>
           </p:contentPart>
         </mc:Choice>
-        <mc:Fallback>
+        <mc:Fallback xmlns="">
           <p:pic>
             <p:nvPicPr>
               <p:cNvPr id="13" name="Ink 12">
@@ -9353,8 +9358,8 @@
           </p:pic>
         </mc:Fallback>
       </mc:AlternateContent>
-      <mc:AlternateContent xmlns:mc="http://schemas.openxmlformats.org/markup-compatibility/2006">
-        <mc:Choice xmlns:p14="http://schemas.microsoft.com/office/powerpoint/2010/main" Requires="p14">
+      <mc:AlternateContent xmlns:mc="http://schemas.openxmlformats.org/markup-compatibility/2006" xmlns:p14="http://schemas.microsoft.com/office/powerpoint/2010/main">
+        <mc:Choice Requires="p14">
           <p:contentPart p14:bwMode="auto" r:id="rId12">
             <p14:nvContentPartPr>
               <p14:cNvPr id="17" name="Ink 16">
@@ -9373,7 +9378,7 @@
             </p14:xfrm>
           </p:contentPart>
         </mc:Choice>
-        <mc:Fallback>
+        <mc:Fallback xmlns="">
           <p:pic>
             <p:nvPicPr>
               <p:cNvPr id="17" name="Ink 16">
@@ -9521,8 +9526,8 @@
           </p:spPr>
         </p:pic>
       </p:grpSp>
-      <mc:AlternateContent xmlns:mc="http://schemas.openxmlformats.org/markup-compatibility/2006">
-        <mc:Choice xmlns:p14="http://schemas.microsoft.com/office/powerpoint/2010/main" Requires="p14">
+      <mc:AlternateContent xmlns:mc="http://schemas.openxmlformats.org/markup-compatibility/2006" xmlns:p14="http://schemas.microsoft.com/office/powerpoint/2010/main">
+        <mc:Choice Requires="p14">
           <p:contentPart p14:bwMode="auto" r:id="rId4">
             <p14:nvContentPartPr>
               <p14:cNvPr id="2" name="Ink 1">
@@ -9541,7 +9546,7 @@
             </p14:xfrm>
           </p:contentPart>
         </mc:Choice>
-        <mc:Fallback>
+        <mc:Fallback xmlns="">
           <p:pic>
             <p:nvPicPr>
               <p:cNvPr id="2" name="Ink 1">
@@ -9572,8 +9577,8 @@
           </p:pic>
         </mc:Fallback>
       </mc:AlternateContent>
-      <mc:AlternateContent xmlns:mc="http://schemas.openxmlformats.org/markup-compatibility/2006">
-        <mc:Choice xmlns:p14="http://schemas.microsoft.com/office/powerpoint/2010/main" Requires="p14">
+      <mc:AlternateContent xmlns:mc="http://schemas.openxmlformats.org/markup-compatibility/2006" xmlns:p14="http://schemas.microsoft.com/office/powerpoint/2010/main">
+        <mc:Choice Requires="p14">
           <p:contentPart p14:bwMode="auto" r:id="rId6">
             <p14:nvContentPartPr>
               <p14:cNvPr id="3" name="Ink 2">
@@ -9592,7 +9597,7 @@
             </p14:xfrm>
           </p:contentPart>
         </mc:Choice>
-        <mc:Fallback>
+        <mc:Fallback xmlns="">
           <p:pic>
             <p:nvPicPr>
               <p:cNvPr id="3" name="Ink 2">
@@ -9623,8 +9628,8 @@
           </p:pic>
         </mc:Fallback>
       </mc:AlternateContent>
-      <mc:AlternateContent xmlns:mc="http://schemas.openxmlformats.org/markup-compatibility/2006">
-        <mc:Choice xmlns:p14="http://schemas.microsoft.com/office/powerpoint/2010/main" Requires="p14">
+      <mc:AlternateContent xmlns:mc="http://schemas.openxmlformats.org/markup-compatibility/2006" xmlns:p14="http://schemas.microsoft.com/office/powerpoint/2010/main">
+        <mc:Choice Requires="p14">
           <p:contentPart p14:bwMode="auto" r:id="rId8">
             <p14:nvContentPartPr>
               <p14:cNvPr id="4" name="Ink 3">
@@ -9643,7 +9648,7 @@
             </p14:xfrm>
           </p:contentPart>
         </mc:Choice>
-        <mc:Fallback>
+        <mc:Fallback xmlns="">
           <p:pic>
             <p:nvPicPr>
               <p:cNvPr id="4" name="Ink 3">
@@ -9674,8 +9679,8 @@
           </p:pic>
         </mc:Fallback>
       </mc:AlternateContent>
-      <mc:AlternateContent xmlns:mc="http://schemas.openxmlformats.org/markup-compatibility/2006">
-        <mc:Choice xmlns:p14="http://schemas.microsoft.com/office/powerpoint/2010/main" Requires="p14">
+      <mc:AlternateContent xmlns:mc="http://schemas.openxmlformats.org/markup-compatibility/2006" xmlns:p14="http://schemas.microsoft.com/office/powerpoint/2010/main">
+        <mc:Choice Requires="p14">
           <p:contentPart p14:bwMode="auto" r:id="rId10">
             <p14:nvContentPartPr>
               <p14:cNvPr id="5" name="Ink 4">
@@ -9694,7 +9699,7 @@
             </p14:xfrm>
           </p:contentPart>
         </mc:Choice>
-        <mc:Fallback>
+        <mc:Fallback xmlns="">
           <p:pic>
             <p:nvPicPr>
               <p:cNvPr id="5" name="Ink 4">
@@ -9725,8 +9730,8 @@
           </p:pic>
         </mc:Fallback>
       </mc:AlternateContent>
-      <mc:AlternateContent xmlns:mc="http://schemas.openxmlformats.org/markup-compatibility/2006">
-        <mc:Choice xmlns:p14="http://schemas.microsoft.com/office/powerpoint/2010/main" Requires="p14">
+      <mc:AlternateContent xmlns:mc="http://schemas.openxmlformats.org/markup-compatibility/2006" xmlns:p14="http://schemas.microsoft.com/office/powerpoint/2010/main">
+        <mc:Choice Requires="p14">
           <p:contentPart p14:bwMode="auto" r:id="rId12">
             <p14:nvContentPartPr>
               <p14:cNvPr id="7" name="Ink 6">
@@ -9745,7 +9750,7 @@
             </p14:xfrm>
           </p:contentPart>
         </mc:Choice>
-        <mc:Fallback>
+        <mc:Fallback xmlns="">
           <p:pic>
             <p:nvPicPr>
               <p:cNvPr id="7" name="Ink 6">
@@ -11153,8 +11158,8 @@
           </a:prstGeom>
         </p:spPr>
       </p:pic>
-      <mc:AlternateContent xmlns:mc="http://schemas.openxmlformats.org/markup-compatibility/2006">
-        <mc:Choice xmlns:p14="http://schemas.microsoft.com/office/powerpoint/2010/main" Requires="p14">
+      <mc:AlternateContent xmlns:mc="http://schemas.openxmlformats.org/markup-compatibility/2006" xmlns:p14="http://schemas.microsoft.com/office/powerpoint/2010/main">
+        <mc:Choice Requires="p14">
           <p:contentPart p14:bwMode="auto" r:id="rId4">
             <p14:nvContentPartPr>
               <p14:cNvPr id="9" name="Ink 8">
@@ -11173,7 +11178,7 @@
             </p14:xfrm>
           </p:contentPart>
         </mc:Choice>
-        <mc:Fallback>
+        <mc:Fallback xmlns="">
           <p:pic>
             <p:nvPicPr>
               <p:cNvPr id="9" name="Ink 8">
@@ -11204,8 +11209,8 @@
           </p:pic>
         </mc:Fallback>
       </mc:AlternateContent>
-      <mc:AlternateContent xmlns:mc="http://schemas.openxmlformats.org/markup-compatibility/2006">
-        <mc:Choice xmlns:p14="http://schemas.microsoft.com/office/powerpoint/2010/main" Requires="p14">
+      <mc:AlternateContent xmlns:mc="http://schemas.openxmlformats.org/markup-compatibility/2006" xmlns:p14="http://schemas.microsoft.com/office/powerpoint/2010/main">
+        <mc:Choice Requires="p14">
           <p:contentPart p14:bwMode="auto" r:id="rId6">
             <p14:nvContentPartPr>
               <p14:cNvPr id="11" name="Ink 10">
@@ -11224,7 +11229,7 @@
             </p14:xfrm>
           </p:contentPart>
         </mc:Choice>
-        <mc:Fallback>
+        <mc:Fallback xmlns="">
           <p:pic>
             <p:nvPicPr>
               <p:cNvPr id="11" name="Ink 10">
@@ -11255,8 +11260,8 @@
           </p:pic>
         </mc:Fallback>
       </mc:AlternateContent>
-      <mc:AlternateContent xmlns:mc="http://schemas.openxmlformats.org/markup-compatibility/2006">
-        <mc:Choice xmlns:p14="http://schemas.microsoft.com/office/powerpoint/2010/main" Requires="p14">
+      <mc:AlternateContent xmlns:mc="http://schemas.openxmlformats.org/markup-compatibility/2006" xmlns:p14="http://schemas.microsoft.com/office/powerpoint/2010/main">
+        <mc:Choice Requires="p14">
           <p:contentPart p14:bwMode="auto" r:id="rId8">
             <p14:nvContentPartPr>
               <p14:cNvPr id="12" name="Ink 11">
@@ -11275,7 +11280,7 @@
             </p14:xfrm>
           </p:contentPart>
         </mc:Choice>
-        <mc:Fallback>
+        <mc:Fallback xmlns="">
           <p:pic>
             <p:nvPicPr>
               <p:cNvPr id="12" name="Ink 11">
@@ -11306,8 +11311,8 @@
           </p:pic>
         </mc:Fallback>
       </mc:AlternateContent>
-      <mc:AlternateContent xmlns:mc="http://schemas.openxmlformats.org/markup-compatibility/2006">
-        <mc:Choice xmlns:p14="http://schemas.microsoft.com/office/powerpoint/2010/main" Requires="p14">
+      <mc:AlternateContent xmlns:mc="http://schemas.openxmlformats.org/markup-compatibility/2006" xmlns:p14="http://schemas.microsoft.com/office/powerpoint/2010/main">
+        <mc:Choice Requires="p14">
           <p:contentPart p14:bwMode="auto" r:id="rId10">
             <p14:nvContentPartPr>
               <p14:cNvPr id="13" name="Ink 12">
@@ -11326,7 +11331,7 @@
             </p14:xfrm>
           </p:contentPart>
         </mc:Choice>
-        <mc:Fallback>
+        <mc:Fallback xmlns="">
           <p:pic>
             <p:nvPicPr>
               <p:cNvPr id="13" name="Ink 12">
@@ -11357,8 +11362,8 @@
           </p:pic>
         </mc:Fallback>
       </mc:AlternateContent>
-      <mc:AlternateContent xmlns:mc="http://schemas.openxmlformats.org/markup-compatibility/2006">
-        <mc:Choice xmlns:p14="http://schemas.microsoft.com/office/powerpoint/2010/main" Requires="p14">
+      <mc:AlternateContent xmlns:mc="http://schemas.openxmlformats.org/markup-compatibility/2006" xmlns:p14="http://schemas.microsoft.com/office/powerpoint/2010/main">
+        <mc:Choice Requires="p14">
           <p:contentPart p14:bwMode="auto" r:id="rId12">
             <p14:nvContentPartPr>
               <p14:cNvPr id="14" name="Ink 13">
@@ -11377,7 +11382,7 @@
             </p14:xfrm>
           </p:contentPart>
         </mc:Choice>
-        <mc:Fallback>
+        <mc:Fallback xmlns="">
           <p:pic>
             <p:nvPicPr>
               <p:cNvPr id="14" name="Ink 13">
@@ -11408,8 +11413,8 @@
           </p:pic>
         </mc:Fallback>
       </mc:AlternateContent>
-      <mc:AlternateContent xmlns:mc="http://schemas.openxmlformats.org/markup-compatibility/2006">
-        <mc:Choice xmlns:p14="http://schemas.microsoft.com/office/powerpoint/2010/main" Requires="p14">
+      <mc:AlternateContent xmlns:mc="http://schemas.openxmlformats.org/markup-compatibility/2006" xmlns:p14="http://schemas.microsoft.com/office/powerpoint/2010/main">
+        <mc:Choice Requires="p14">
           <p:contentPart p14:bwMode="auto" r:id="rId14">
             <p14:nvContentPartPr>
               <p14:cNvPr id="15" name="Ink 14">
@@ -11428,7 +11433,7 @@
             </p14:xfrm>
           </p:contentPart>
         </mc:Choice>
-        <mc:Fallback>
+        <mc:Fallback xmlns="">
           <p:pic>
             <p:nvPicPr>
               <p:cNvPr id="15" name="Ink 14">
@@ -11459,8 +11464,8 @@
           </p:pic>
         </mc:Fallback>
       </mc:AlternateContent>
-      <mc:AlternateContent xmlns:mc="http://schemas.openxmlformats.org/markup-compatibility/2006">
-        <mc:Choice xmlns:p14="http://schemas.microsoft.com/office/powerpoint/2010/main" Requires="p14">
+      <mc:AlternateContent xmlns:mc="http://schemas.openxmlformats.org/markup-compatibility/2006" xmlns:p14="http://schemas.microsoft.com/office/powerpoint/2010/main">
+        <mc:Choice Requires="p14">
           <p:contentPart p14:bwMode="auto" r:id="rId16">
             <p14:nvContentPartPr>
               <p14:cNvPr id="16" name="Ink 15">
@@ -11479,7 +11484,7 @@
             </p14:xfrm>
           </p:contentPart>
         </mc:Choice>
-        <mc:Fallback>
+        <mc:Fallback xmlns="">
           <p:pic>
             <p:nvPicPr>
               <p:cNvPr id="16" name="Ink 15">
@@ -11510,8 +11515,8 @@
           </p:pic>
         </mc:Fallback>
       </mc:AlternateContent>
-      <mc:AlternateContent xmlns:mc="http://schemas.openxmlformats.org/markup-compatibility/2006">
-        <mc:Choice xmlns:p14="http://schemas.microsoft.com/office/powerpoint/2010/main" Requires="p14">
+      <mc:AlternateContent xmlns:mc="http://schemas.openxmlformats.org/markup-compatibility/2006" xmlns:p14="http://schemas.microsoft.com/office/powerpoint/2010/main">
+        <mc:Choice Requires="p14">
           <p:contentPart p14:bwMode="auto" r:id="rId18">
             <p14:nvContentPartPr>
               <p14:cNvPr id="17" name="Ink 16">
@@ -11530,7 +11535,7 @@
             </p14:xfrm>
           </p:contentPart>
         </mc:Choice>
-        <mc:Fallback>
+        <mc:Fallback xmlns="">
           <p:pic>
             <p:nvPicPr>
               <p:cNvPr id="17" name="Ink 16">
@@ -11561,8 +11566,8 @@
           </p:pic>
         </mc:Fallback>
       </mc:AlternateContent>
-      <mc:AlternateContent xmlns:mc="http://schemas.openxmlformats.org/markup-compatibility/2006">
-        <mc:Choice xmlns:p14="http://schemas.microsoft.com/office/powerpoint/2010/main" Requires="p14">
+      <mc:AlternateContent xmlns:mc="http://schemas.openxmlformats.org/markup-compatibility/2006" xmlns:p14="http://schemas.microsoft.com/office/powerpoint/2010/main">
+        <mc:Choice Requires="p14">
           <p:contentPart p14:bwMode="auto" r:id="rId20">
             <p14:nvContentPartPr>
               <p14:cNvPr id="18" name="Ink 17">
@@ -11581,7 +11586,7 @@
             </p14:xfrm>
           </p:contentPart>
         </mc:Choice>
-        <mc:Fallback>
+        <mc:Fallback xmlns="">
           <p:pic>
             <p:nvPicPr>
               <p:cNvPr id="18" name="Ink 17">

--- a/Oliver Ng - Presentation.pptx
+++ b/Oliver Ng - Presentation.pptx
@@ -7742,8 +7742,8 @@
           </a:p>
         </p:txBody>
       </p:sp>
-      <mc:AlternateContent xmlns:mc="http://schemas.openxmlformats.org/markup-compatibility/2006" xmlns:a14="http://schemas.microsoft.com/office/drawing/2010/main">
-        <mc:Choice Requires="a14">
+      <mc:AlternateContent xmlns:mc="http://schemas.openxmlformats.org/markup-compatibility/2006">
+        <mc:Choice xmlns:a14="http://schemas.microsoft.com/office/drawing/2010/main" Requires="a14">
           <p:sp>
             <p:nvSpPr>
               <p:cNvPr id="3" name="Content Placeholder 2">
@@ -8019,7 +8019,7 @@
                     <a:latin typeface="Helvetica" panose="020B0604020202020204" pitchFamily="34" charset="0"/>
                     <a:cs typeface="Helvetica" panose="020B0604020202020204" pitchFamily="34" charset="0"/>
                   </a:rPr>
-                  <a:t>2)</a:t>
+                  <a:t>2) </a:t>
                 </a:r>
                 <a14:m>
                   <m:oMath xmlns:m="http://schemas.openxmlformats.org/officeDocument/2006/math">
@@ -8420,7 +8420,7 @@
                     <a:latin typeface="Helvetica" panose="020B0604020202020204" pitchFamily="34" charset="0"/>
                     <a:cs typeface="Helvetica" panose="020B0604020202020204" pitchFamily="34" charset="0"/>
                   </a:rPr>
-                  <a:t>3)</a:t>
+                  <a:t>3) </a:t>
                 </a:r>
                 <a14:m>
                   <m:oMath xmlns:m="http://schemas.openxmlformats.org/officeDocument/2006/math">
@@ -8850,7 +8850,7 @@
             </p:txBody>
           </p:sp>
         </mc:Choice>
-        <mc:Fallback xmlns="">
+        <mc:Fallback>
           <p:sp>
             <p:nvSpPr>
               <p:cNvPr id="3" name="Content Placeholder 2">

--- a/Oliver Ng - Presentation.pptx
+++ b/Oliver Ng - Presentation.pptx
@@ -10277,7 +10277,7 @@
         </p:blipFill>
         <p:spPr>
           <a:xfrm>
-            <a:off x="26988" y="-9144"/>
+            <a:off x="26988" y="-18380"/>
             <a:ext cx="12138025" cy="6858000"/>
           </a:xfrm>
           <a:prstGeom prst="rect">

--- a/Oliver Ng - Presentation.pptx
+++ b/Oliver Ng - Presentation.pptx
@@ -7742,8 +7742,8 @@
           </a:p>
         </p:txBody>
       </p:sp>
-      <mc:AlternateContent xmlns:mc="http://schemas.openxmlformats.org/markup-compatibility/2006">
-        <mc:Choice xmlns:a14="http://schemas.microsoft.com/office/drawing/2010/main" Requires="a14">
+      <mc:AlternateContent xmlns:mc="http://schemas.openxmlformats.org/markup-compatibility/2006" xmlns:a14="http://schemas.microsoft.com/office/drawing/2010/main">
+        <mc:Choice Requires="a14">
           <p:sp>
             <p:nvSpPr>
               <p:cNvPr id="3" name="Content Placeholder 2">
@@ -8850,7 +8850,7 @@
             </p:txBody>
           </p:sp>
         </mc:Choice>
-        <mc:Fallback>
+        <mc:Fallback xmlns="">
           <p:sp>
             <p:nvSpPr>
               <p:cNvPr id="3" name="Content Placeholder 2">
@@ -8964,10 +8964,10 @@
       </p:grpSpPr>
       <p:grpSp>
         <p:nvGrpSpPr>
-          <p:cNvPr id="9" name="Group 8">
+          <p:cNvPr id="19" name="Group 18">
             <a:extLst>
               <a:ext uri="{FF2B5EF4-FFF2-40B4-BE49-F238E27FC236}">
-                <a16:creationId xmlns:a16="http://schemas.microsoft.com/office/drawing/2014/main" id="{30E3D402-5358-D9B5-0814-21304FB02832}"/>
+                <a16:creationId xmlns:a16="http://schemas.microsoft.com/office/drawing/2014/main" id="{B24DF030-70F8-B4FC-31A6-3445FFC807A5}"/>
               </a:ext>
             </a:extLst>
           </p:cNvPr>
@@ -8976,18 +8976,18 @@
         </p:nvGrpSpPr>
         <p:grpSpPr>
           <a:xfrm>
-            <a:off x="-35053" y="345332"/>
-            <a:ext cx="12262105" cy="6167336"/>
-            <a:chOff x="-1" y="0"/>
-            <a:chExt cx="12262105" cy="6167336"/>
+            <a:off x="287924" y="215900"/>
+            <a:ext cx="11616152" cy="6426200"/>
+            <a:chOff x="0" y="0"/>
+            <a:chExt cx="12396684" cy="6858000"/>
           </a:xfrm>
         </p:grpSpPr>
         <p:pic>
           <p:nvPicPr>
-            <p:cNvPr id="6" name="Picture 5">
+            <p:cNvPr id="16" name="Picture 15">
               <a:extLst>
                 <a:ext uri="{FF2B5EF4-FFF2-40B4-BE49-F238E27FC236}">
-                  <a16:creationId xmlns:a16="http://schemas.microsoft.com/office/drawing/2014/main" id="{32A4C99D-4879-96D3-65D1-AE15AAD74155}"/>
+                  <a16:creationId xmlns:a16="http://schemas.microsoft.com/office/drawing/2014/main" id="{CEF8B639-84B3-2E7C-839D-BBBD65A53A52}"/>
                 </a:ext>
               </a:extLst>
             </p:cNvPr>
@@ -9004,8 +9004,8 @@
           </p:blipFill>
           <p:spPr>
             <a:xfrm>
-              <a:off x="-1" y="1"/>
-              <a:ext cx="6036301" cy="6167335"/>
+              <a:off x="0" y="0"/>
+              <a:ext cx="6001926" cy="6858000"/>
             </a:xfrm>
             <a:prstGeom prst="rect">
               <a:avLst/>
@@ -9014,10 +9014,10 @@
         </p:pic>
         <p:pic>
           <p:nvPicPr>
-            <p:cNvPr id="8" name="Picture 7">
+            <p:cNvPr id="18" name="Picture 17">
               <a:extLst>
                 <a:ext uri="{FF2B5EF4-FFF2-40B4-BE49-F238E27FC236}">
-                  <a16:creationId xmlns:a16="http://schemas.microsoft.com/office/drawing/2014/main" id="{270094C9-BA51-F99E-394C-ACC6AD0C4C32}"/>
+                  <a16:creationId xmlns:a16="http://schemas.microsoft.com/office/drawing/2014/main" id="{B24239E2-20CE-F650-6A3E-DB6E571CE92D}"/>
                 </a:ext>
               </a:extLst>
             </p:cNvPr>
@@ -9034,8 +9034,8 @@
           </p:blipFill>
           <p:spPr>
             <a:xfrm>
-              <a:off x="5930791" y="0"/>
-              <a:ext cx="6331313" cy="6167336"/>
+              <a:off x="6001926" y="0"/>
+              <a:ext cx="6394758" cy="6858000"/>
             </a:xfrm>
             <a:prstGeom prst="rect">
               <a:avLst/>
@@ -9075,10 +9075,10 @@
       </p:grpSpPr>
       <p:grpSp>
         <p:nvGrpSpPr>
-          <p:cNvPr id="9" name="Group 8">
+          <p:cNvPr id="2" name="Group 1">
             <a:extLst>
               <a:ext uri="{FF2B5EF4-FFF2-40B4-BE49-F238E27FC236}">
-                <a16:creationId xmlns:a16="http://schemas.microsoft.com/office/drawing/2014/main" id="{7944F070-6D64-45C8-0E02-BE0243F646A1}"/>
+                <a16:creationId xmlns:a16="http://schemas.microsoft.com/office/drawing/2014/main" id="{63DE2E26-A4E2-4D6B-0A01-4050FD481E15}"/>
               </a:ext>
             </a:extLst>
           </p:cNvPr>
@@ -9087,18 +9087,18 @@
         </p:nvGrpSpPr>
         <p:grpSpPr>
           <a:xfrm>
-            <a:off x="-35053" y="345332"/>
-            <a:ext cx="12262105" cy="6167336"/>
-            <a:chOff x="-1" y="0"/>
-            <a:chExt cx="12262105" cy="6167336"/>
+            <a:off x="287924" y="215900"/>
+            <a:ext cx="11616152" cy="6426200"/>
+            <a:chOff x="0" y="0"/>
+            <a:chExt cx="12396684" cy="6858000"/>
           </a:xfrm>
         </p:grpSpPr>
         <p:pic>
           <p:nvPicPr>
-            <p:cNvPr id="6" name="Picture 5">
+            <p:cNvPr id="3" name="Picture 2">
               <a:extLst>
                 <a:ext uri="{FF2B5EF4-FFF2-40B4-BE49-F238E27FC236}">
-                  <a16:creationId xmlns:a16="http://schemas.microsoft.com/office/drawing/2014/main" id="{D8F65EC4-8926-1010-45D8-B9BCA73B82B2}"/>
+                  <a16:creationId xmlns:a16="http://schemas.microsoft.com/office/drawing/2014/main" id="{5DEF7D38-FCD2-977D-FF69-7A8554395695}"/>
                 </a:ext>
               </a:extLst>
             </p:cNvPr>
@@ -9115,8 +9115,8 @@
           </p:blipFill>
           <p:spPr>
             <a:xfrm>
-              <a:off x="-1" y="1"/>
-              <a:ext cx="6036301" cy="6167335"/>
+              <a:off x="0" y="0"/>
+              <a:ext cx="6001926" cy="6858000"/>
             </a:xfrm>
             <a:prstGeom prst="rect">
               <a:avLst/>
@@ -9125,10 +9125,10 @@
         </p:pic>
         <p:pic>
           <p:nvPicPr>
-            <p:cNvPr id="8" name="Picture 7">
+            <p:cNvPr id="4" name="Picture 3">
               <a:extLst>
                 <a:ext uri="{FF2B5EF4-FFF2-40B4-BE49-F238E27FC236}">
-                  <a16:creationId xmlns:a16="http://schemas.microsoft.com/office/drawing/2014/main" id="{F023D3B0-AEDD-DD30-3DC8-D80F434D27B6}"/>
+                  <a16:creationId xmlns:a16="http://schemas.microsoft.com/office/drawing/2014/main" id="{CE39BFED-FC54-2371-335D-345787AD2909}"/>
                 </a:ext>
               </a:extLst>
             </p:cNvPr>
@@ -9145,8 +9145,8 @@
           </p:blipFill>
           <p:spPr>
             <a:xfrm>
-              <a:off x="5930791" y="0"/>
-              <a:ext cx="6331313" cy="6167336"/>
+              <a:off x="6001926" y="0"/>
+              <a:ext cx="6394758" cy="6858000"/>
             </a:xfrm>
             <a:prstGeom prst="rect">
               <a:avLst/>
@@ -9154,8 +9154,8 @@
           </p:spPr>
         </p:pic>
       </p:grpSp>
-      <mc:AlternateContent xmlns:mc="http://schemas.openxmlformats.org/markup-compatibility/2006" xmlns:p14="http://schemas.microsoft.com/office/powerpoint/2010/main">
-        <mc:Choice Requires="p14">
+      <mc:AlternateContent xmlns:mc="http://schemas.openxmlformats.org/markup-compatibility/2006">
+        <mc:Choice xmlns:p14="http://schemas.microsoft.com/office/powerpoint/2010/main" Requires="p14">
           <p:contentPart p14:bwMode="auto" r:id="rId4">
             <p14:nvContentPartPr>
               <p14:cNvPr id="10" name="Ink 9">
@@ -9169,12 +9169,12 @@
               <p14:nvPr/>
             </p14:nvContentPartPr>
             <p14:xfrm>
-              <a:off x="9409104" y="466056"/>
+              <a:off x="9067378" y="373692"/>
               <a:ext cx="612360" cy="31680"/>
             </p14:xfrm>
           </p:contentPart>
         </mc:Choice>
-        <mc:Fallback xmlns="">
+        <mc:Fallback>
           <p:pic>
             <p:nvPicPr>
               <p:cNvPr id="10" name="Ink 9">
@@ -9195,8 +9195,8 @@
             </p:blipFill>
             <p:spPr>
               <a:xfrm>
-                <a:off x="9355464" y="358416"/>
-                <a:ext cx="720000" cy="247320"/>
+                <a:off x="9013346" y="264451"/>
+                <a:ext cx="720063" cy="249799"/>
               </a:xfrm>
               <a:prstGeom prst="rect">
                 <a:avLst/>
@@ -9205,8 +9205,8 @@
           </p:pic>
         </mc:Fallback>
       </mc:AlternateContent>
-      <mc:AlternateContent xmlns:mc="http://schemas.openxmlformats.org/markup-compatibility/2006" xmlns:p14="http://schemas.microsoft.com/office/powerpoint/2010/main">
-        <mc:Choice Requires="p14">
+      <mc:AlternateContent xmlns:mc="http://schemas.openxmlformats.org/markup-compatibility/2006">
+        <mc:Choice xmlns:p14="http://schemas.microsoft.com/office/powerpoint/2010/main" Requires="p14">
           <p:contentPart p14:bwMode="auto" r:id="rId6">
             <p14:nvContentPartPr>
               <p14:cNvPr id="11" name="Ink 10">
@@ -9220,12 +9220,12 @@
               <p14:nvPr/>
             </p14:nvContentPartPr>
             <p14:xfrm>
-              <a:off x="9436464" y="895176"/>
+              <a:off x="3162330" y="6307685"/>
               <a:ext cx="639360" cy="10440"/>
             </p14:xfrm>
           </p:contentPart>
         </mc:Choice>
-        <mc:Fallback xmlns="">
+        <mc:Fallback>
           <p:pic>
             <p:nvPicPr>
               <p:cNvPr id="11" name="Ink 10">
@@ -9246,8 +9246,8 @@
             </p:blipFill>
             <p:spPr>
               <a:xfrm>
-                <a:off x="9382464" y="787176"/>
-                <a:ext cx="747000" cy="226080"/>
+                <a:off x="3108360" y="6199685"/>
+                <a:ext cx="746939" cy="226080"/>
               </a:xfrm>
               <a:prstGeom prst="rect">
                 <a:avLst/>
@@ -9256,8 +9256,8 @@
           </p:pic>
         </mc:Fallback>
       </mc:AlternateContent>
-      <mc:AlternateContent xmlns:mc="http://schemas.openxmlformats.org/markup-compatibility/2006" xmlns:p14="http://schemas.microsoft.com/office/powerpoint/2010/main">
-        <mc:Choice Requires="p14">
+      <mc:AlternateContent xmlns:mc="http://schemas.openxmlformats.org/markup-compatibility/2006">
+        <mc:Choice xmlns:p14="http://schemas.microsoft.com/office/powerpoint/2010/main" Requires="p14">
           <p:contentPart p14:bwMode="auto" r:id="rId8">
             <p14:nvContentPartPr>
               <p14:cNvPr id="12" name="Ink 11">
@@ -9271,12 +9271,12 @@
               <p14:nvPr/>
             </p14:nvContentPartPr>
             <p14:xfrm>
-              <a:off x="9491544" y="2838096"/>
+              <a:off x="9094380" y="2339333"/>
               <a:ext cx="475200" cy="15480"/>
             </p14:xfrm>
           </p:contentPart>
         </mc:Choice>
-        <mc:Fallback xmlns="">
+        <mc:Fallback>
           <p:pic>
             <p:nvPicPr>
               <p:cNvPr id="12" name="Ink 11">
@@ -9297,7 +9297,7 @@
             </p:blipFill>
             <p:spPr>
               <a:xfrm>
-                <a:off x="9437544" y="2730096"/>
+                <a:off x="9040380" y="2231333"/>
                 <a:ext cx="582840" cy="231120"/>
               </a:xfrm>
               <a:prstGeom prst="rect">
@@ -9307,8 +9307,8 @@
           </p:pic>
         </mc:Fallback>
       </mc:AlternateContent>
-      <mc:AlternateContent xmlns:mc="http://schemas.openxmlformats.org/markup-compatibility/2006" xmlns:p14="http://schemas.microsoft.com/office/powerpoint/2010/main">
-        <mc:Choice Requires="p14">
+      <mc:AlternateContent xmlns:mc="http://schemas.openxmlformats.org/markup-compatibility/2006">
+        <mc:Choice xmlns:p14="http://schemas.microsoft.com/office/powerpoint/2010/main" Requires="p14">
           <p:contentPart p14:bwMode="auto" r:id="rId10">
             <p14:nvContentPartPr>
               <p14:cNvPr id="13" name="Ink 12">
@@ -9322,12 +9322,12 @@
               <p14:nvPr/>
             </p14:nvContentPartPr>
             <p14:xfrm>
-              <a:off x="3337344" y="5713056"/>
+              <a:off x="3203370" y="5380547"/>
               <a:ext cx="557280" cy="20880"/>
             </p14:xfrm>
           </p:contentPart>
         </mc:Choice>
-        <mc:Fallback xmlns="">
+        <mc:Fallback>
           <p:pic>
             <p:nvPicPr>
               <p:cNvPr id="13" name="Ink 12">
@@ -9348,7 +9348,7 @@
             </p:blipFill>
             <p:spPr>
               <a:xfrm>
-                <a:off x="3283344" y="5605416"/>
+                <a:off x="3149370" y="5272547"/>
                 <a:ext cx="664920" cy="236520"/>
               </a:xfrm>
               <a:prstGeom prst="rect">
@@ -9447,10 +9447,10 @@
       </p:grpSpPr>
       <p:grpSp>
         <p:nvGrpSpPr>
-          <p:cNvPr id="9" name="Group 8">
+          <p:cNvPr id="10" name="Group 9">
             <a:extLst>
               <a:ext uri="{FF2B5EF4-FFF2-40B4-BE49-F238E27FC236}">
-                <a16:creationId xmlns:a16="http://schemas.microsoft.com/office/drawing/2014/main" id="{C4BA14BC-F0BA-4317-103B-9498C936DF13}"/>
+                <a16:creationId xmlns:a16="http://schemas.microsoft.com/office/drawing/2014/main" id="{4A013B5E-FD73-102E-1558-27A2650F17E2}"/>
               </a:ext>
             </a:extLst>
           </p:cNvPr>
@@ -9459,18 +9459,18 @@
         </p:nvGrpSpPr>
         <p:grpSpPr>
           <a:xfrm>
-            <a:off x="-35053" y="345332"/>
-            <a:ext cx="12262105" cy="6167336"/>
-            <a:chOff x="-1" y="0"/>
-            <a:chExt cx="12262105" cy="6167336"/>
+            <a:off x="287924" y="215900"/>
+            <a:ext cx="11616152" cy="6426200"/>
+            <a:chOff x="0" y="0"/>
+            <a:chExt cx="12396684" cy="6858000"/>
           </a:xfrm>
         </p:grpSpPr>
         <p:pic>
           <p:nvPicPr>
-            <p:cNvPr id="6" name="Picture 5">
+            <p:cNvPr id="11" name="Picture 10">
               <a:extLst>
                 <a:ext uri="{FF2B5EF4-FFF2-40B4-BE49-F238E27FC236}">
-                  <a16:creationId xmlns:a16="http://schemas.microsoft.com/office/drawing/2014/main" id="{853A0142-7DA0-5FAA-F59C-8C51A1CB3FDF}"/>
+                  <a16:creationId xmlns:a16="http://schemas.microsoft.com/office/drawing/2014/main" id="{A8C66B32-D1FB-3DAD-DB2E-3E71A5FFCBBA}"/>
                 </a:ext>
               </a:extLst>
             </p:cNvPr>
@@ -9487,8 +9487,8 @@
           </p:blipFill>
           <p:spPr>
             <a:xfrm>
-              <a:off x="-1" y="1"/>
-              <a:ext cx="6036301" cy="6167335"/>
+              <a:off x="0" y="0"/>
+              <a:ext cx="6001926" cy="6858000"/>
             </a:xfrm>
             <a:prstGeom prst="rect">
               <a:avLst/>
@@ -9497,10 +9497,10 @@
         </p:pic>
         <p:pic>
           <p:nvPicPr>
-            <p:cNvPr id="8" name="Picture 7">
+            <p:cNvPr id="12" name="Picture 11">
               <a:extLst>
                 <a:ext uri="{FF2B5EF4-FFF2-40B4-BE49-F238E27FC236}">
-                  <a16:creationId xmlns:a16="http://schemas.microsoft.com/office/drawing/2014/main" id="{E41E1B61-5066-09B2-B02B-CD472D639F05}"/>
+                  <a16:creationId xmlns:a16="http://schemas.microsoft.com/office/drawing/2014/main" id="{BF82B02E-8620-40A0-4978-01B3235B1A7D}"/>
                 </a:ext>
               </a:extLst>
             </p:cNvPr>
@@ -9517,8 +9517,8 @@
           </p:blipFill>
           <p:spPr>
             <a:xfrm>
-              <a:off x="5930791" y="0"/>
-              <a:ext cx="6331313" cy="6167336"/>
+              <a:off x="6001926" y="0"/>
+              <a:ext cx="6394758" cy="6858000"/>
             </a:xfrm>
             <a:prstGeom prst="rect">
               <a:avLst/>
@@ -9526,8 +9526,8 @@
           </p:spPr>
         </p:pic>
       </p:grpSp>
-      <mc:AlternateContent xmlns:mc="http://schemas.openxmlformats.org/markup-compatibility/2006" xmlns:p14="http://schemas.microsoft.com/office/powerpoint/2010/main">
-        <mc:Choice Requires="p14">
+      <mc:AlternateContent xmlns:mc="http://schemas.openxmlformats.org/markup-compatibility/2006">
+        <mc:Choice xmlns:p14="http://schemas.microsoft.com/office/powerpoint/2010/main" Requires="p14">
           <p:contentPart p14:bwMode="auto" r:id="rId4">
             <p14:nvContentPartPr>
               <p14:cNvPr id="2" name="Ink 1">
@@ -9541,12 +9541,12 @@
               <p14:nvPr/>
             </p14:nvContentPartPr>
             <p14:xfrm>
-              <a:off x="11055024" y="475416"/>
+              <a:off x="10730664" y="398196"/>
               <a:ext cx="520560" cy="5760"/>
             </p14:xfrm>
           </p:contentPart>
         </mc:Choice>
-        <mc:Fallback xmlns="">
+        <mc:Fallback>
           <p:pic>
             <p:nvPicPr>
               <p:cNvPr id="2" name="Ink 1">
@@ -9567,8 +9567,8 @@
             </p:blipFill>
             <p:spPr>
               <a:xfrm>
-                <a:off x="11001024" y="367416"/>
-                <a:ext cx="628200" cy="221400"/>
+                <a:off x="10676664" y="296549"/>
+                <a:ext cx="628200" cy="208715"/>
               </a:xfrm>
               <a:prstGeom prst="rect">
                 <a:avLst/>
@@ -9577,8 +9577,8 @@
           </p:pic>
         </mc:Fallback>
       </mc:AlternateContent>
-      <mc:AlternateContent xmlns:mc="http://schemas.openxmlformats.org/markup-compatibility/2006" xmlns:p14="http://schemas.microsoft.com/office/powerpoint/2010/main">
-        <mc:Choice Requires="p14">
+      <mc:AlternateContent xmlns:mc="http://schemas.openxmlformats.org/markup-compatibility/2006">
+        <mc:Choice xmlns:p14="http://schemas.microsoft.com/office/powerpoint/2010/main" Requires="p14">
           <p:contentPart p14:bwMode="auto" r:id="rId6">
             <p14:nvContentPartPr>
               <p14:cNvPr id="3" name="Ink 2">
@@ -9592,12 +9592,12 @@
               <p14:nvPr/>
             </p14:nvContentPartPr>
             <p14:xfrm>
-              <a:off x="10990944" y="1938456"/>
+              <a:off x="10759706" y="1426897"/>
               <a:ext cx="612360" cy="27720"/>
             </p14:xfrm>
           </p:contentPart>
         </mc:Choice>
-        <mc:Fallback xmlns="">
+        <mc:Fallback>
           <p:pic>
             <p:nvPicPr>
               <p:cNvPr id="3" name="Ink 2">
@@ -9618,7 +9618,7 @@
             </p:blipFill>
             <p:spPr>
               <a:xfrm>
-                <a:off x="10936944" y="1830456"/>
+                <a:off x="10705706" y="1318897"/>
                 <a:ext cx="720000" cy="243360"/>
               </a:xfrm>
               <a:prstGeom prst="rect">
@@ -9628,8 +9628,8 @@
           </p:pic>
         </mc:Fallback>
       </mc:AlternateContent>
-      <mc:AlternateContent xmlns:mc="http://schemas.openxmlformats.org/markup-compatibility/2006" xmlns:p14="http://schemas.microsoft.com/office/powerpoint/2010/main">
-        <mc:Choice Requires="p14">
+      <mc:AlternateContent xmlns:mc="http://schemas.openxmlformats.org/markup-compatibility/2006">
+        <mc:Choice xmlns:p14="http://schemas.microsoft.com/office/powerpoint/2010/main" Requires="p14">
           <p:contentPart p14:bwMode="auto" r:id="rId8">
             <p14:nvContentPartPr>
               <p14:cNvPr id="4" name="Ink 3">
@@ -9643,12 +9643,12 @@
               <p14:nvPr/>
             </p14:nvContentPartPr>
             <p14:xfrm>
-              <a:off x="11027664" y="895896"/>
+              <a:off x="10826784" y="2723414"/>
               <a:ext cx="529200" cy="64440"/>
             </p14:xfrm>
           </p:contentPart>
         </mc:Choice>
-        <mc:Fallback xmlns="">
+        <mc:Fallback>
           <p:pic>
             <p:nvPicPr>
               <p:cNvPr id="4" name="Ink 3">
@@ -9669,7 +9669,7 @@
             </p:blipFill>
             <p:spPr>
               <a:xfrm>
-                <a:off x="10973664" y="787896"/>
+                <a:off x="10772784" y="2615414"/>
                 <a:ext cx="636840" cy="280080"/>
               </a:xfrm>
               <a:prstGeom prst="rect">
@@ -9679,8 +9679,8 @@
           </p:pic>
         </mc:Fallback>
       </mc:AlternateContent>
-      <mc:AlternateContent xmlns:mc="http://schemas.openxmlformats.org/markup-compatibility/2006" xmlns:p14="http://schemas.microsoft.com/office/powerpoint/2010/main">
-        <mc:Choice Requires="p14">
+      <mc:AlternateContent xmlns:mc="http://schemas.openxmlformats.org/markup-compatibility/2006">
+        <mc:Choice xmlns:p14="http://schemas.microsoft.com/office/powerpoint/2010/main" Requires="p14">
           <p:contentPart p14:bwMode="auto" r:id="rId10">
             <p14:nvContentPartPr>
               <p14:cNvPr id="5" name="Ink 4">
@@ -9694,12 +9694,12 @@
               <p14:nvPr/>
             </p14:nvContentPartPr>
             <p14:xfrm>
-              <a:off x="11091384" y="3245976"/>
+              <a:off x="10793906" y="2262319"/>
               <a:ext cx="543960" cy="68760"/>
             </p14:xfrm>
           </p:contentPart>
         </mc:Choice>
-        <mc:Fallback xmlns="">
+        <mc:Fallback>
           <p:pic>
             <p:nvPicPr>
               <p:cNvPr id="5" name="Ink 4">
@@ -9720,7 +9720,7 @@
             </p:blipFill>
             <p:spPr>
               <a:xfrm>
-                <a:off x="11037744" y="3137976"/>
+                <a:off x="10739906" y="2154319"/>
                 <a:ext cx="651600" cy="284400"/>
               </a:xfrm>
               <a:prstGeom prst="rect">
@@ -9730,8 +9730,8 @@
           </p:pic>
         </mc:Fallback>
       </mc:AlternateContent>
-      <mc:AlternateContent xmlns:mc="http://schemas.openxmlformats.org/markup-compatibility/2006" xmlns:p14="http://schemas.microsoft.com/office/powerpoint/2010/main">
-        <mc:Choice Requires="p14">
+      <mc:AlternateContent xmlns:mc="http://schemas.openxmlformats.org/markup-compatibility/2006">
+        <mc:Choice xmlns:p14="http://schemas.microsoft.com/office/powerpoint/2010/main" Requires="p14">
           <p:contentPart p14:bwMode="auto" r:id="rId12">
             <p14:nvContentPartPr>
               <p14:cNvPr id="7" name="Ink 6">
@@ -9745,12 +9745,12 @@
               <p14:nvPr/>
             </p14:nvContentPartPr>
             <p14:xfrm>
-              <a:off x="4745664" y="1133856"/>
+              <a:off x="4717954" y="6296983"/>
               <a:ext cx="804600" cy="45360"/>
             </p14:xfrm>
           </p:contentPart>
         </mc:Choice>
-        <mc:Fallback xmlns="">
+        <mc:Fallback>
           <p:pic>
             <p:nvPicPr>
               <p:cNvPr id="7" name="Ink 6">
@@ -9771,8 +9771,8 @@
             </p:blipFill>
             <p:spPr>
               <a:xfrm>
-                <a:off x="4691664" y="1025856"/>
-                <a:ext cx="912240" cy="261000"/>
+                <a:off x="4663978" y="6188983"/>
+                <a:ext cx="912192" cy="261000"/>
               </a:xfrm>
               <a:prstGeom prst="rect">
                 <a:avLst/>
